--- a/static/images/clawtrap.pptx
+++ b/static/images/clawtrap.pptx
@@ -4747,7 +4747,7 @@
         </p:blipFill>
         <p:spPr>
           <a:xfrm>
-            <a:off x="-2983865" y="-280670"/>
+            <a:off x="-2939415" y="-280670"/>
             <a:ext cx="1254760" cy="1254760"/>
           </a:xfrm>
           <a:prstGeom prst="rect">
